--- a/src/Triumvirate/Triumvirate - Spell Distribution.pptx
+++ b/src/Triumvirate/Triumvirate - Spell Distribution.pptx
@@ -3719,7 +3719,7 @@
                 </a:solidFill>
                 <a:latin typeface="Calibri"/>
               </a:rPr>
-              <a:t>With the gate gone, every vendor would sell every tier. So the top two tiers are cut out of the 15 per-school parent bundles and placed directly at five capital and underworld chests. No new records — the tier bundles already existed.</a:t>
+              <a:t>With the gate gone, every vendor would sell every tier. So the top two tiers are cut out of the 15 per-school parent bundles and placed at five capital and underworld merchants instead — into their CustomMerchandise hooks, like everything else.</a:t>
             </a:r>
           </a:p>
         </p:txBody>
@@ -4384,7 +4384,7 @@
                 </a:solidFill>
                 <a:latin typeface="Calibri"/>
               </a:rPr>
-              <a:t>Wild Mage</a:t>
+              <a:t>Shrouded Mage</a:t>
             </a:r>
           </a:p>
         </p:txBody>
@@ -4849,7 +4849,7 @@
                 </a:solidFill>
                 <a:latin typeface="Calibri"/>
               </a:rPr>
-              <a:t>Hehler</a:t>
+              <a:t>The Fence</a:t>
             </a:r>
           </a:p>
         </p:txBody>
@@ -4994,7 +4994,7 @@
                 </a:solidFill>
                 <a:latin typeface="Calibri"/>
               </a:rPr>
-              <a:t>Druid and Shaman have no Ark/Undercity vendor of their own, so they go to the two shops that can justify carrying anything — the library and the Wild Mage. Sister Envy is NOT Undercity: her chest sits in FSNQR03RhalataTemple, so the richest vendor in the set keeps the low tiers only.</a:t>
+              <a:t>Druid and Shaman have no Ark/Undercity vendor of their own, so they go to the two shops that can justify carrying anything — the library and the Shrouded Mage. Sister Envy is NOT Undercity: her chest sits in FSNQR03RhalataTemple, so the richest vendor in the set keeps the low tiers only.</a:t>
             </a:r>
           </a:p>
         </p:txBody>
@@ -5408,7 +5408,7 @@
                 </a:solidFill>
                 <a:latin typeface="Calibri"/>
               </a:rPr>
-              <a:t>Byte-identical across two builds</a:t>
+              <a:t>Zero container overrides</a:t>
             </a:r>
           </a:p>
           <a:p>
@@ -5430,7 +5430,7 @@
                 </a:solidFill>
                 <a:latin typeface="Calibri"/>
               </a:rPr>
-              <a:t>SHA-256 881505F7…7164C7, 745,651 bytes — the guard against Spriggit silently dropping leveled-list entries</a:t>
+              <a:t>The whole override surface is 10 LeveledItems — each confirmed absent from EGO's conflict index and from Apocalypse</a:t>
             </a:r>
           </a:p>
         </p:txBody>
@@ -5537,7 +5537,7 @@
                 </a:solidFill>
                 <a:latin typeface="Calibri"/>
               </a:rPr>
-              <a:t>HEDR 1.70, masters intact</a:t>
+              <a:t>Byte-identical across two builds</a:t>
             </a:r>
           </a:p>
           <a:p>
@@ -5559,7 +5559,7 @@
                 </a:solidFill>
                 <a:latin typeface="Calibri"/>
               </a:rPr>
-              <a:t>Re-read out of the built binary at offset 30, not assumed</a:t>
+              <a:t>SHA-256 43B8EF1E…161510, 739,071 bytes — the guard against Spriggit dropping leveled-list entries</a:t>
             </a:r>
           </a:p>
         </p:txBody>
@@ -5666,7 +5666,7 @@
                 </a:solidFill>
                 <a:latin typeface="Calibri"/>
               </a:rPr>
-              <a:t>The generator is idempotent</a:t>
+              <a:t>HEDR 1.70, masters intact; 40 missing refs</a:t>
             </a:r>
           </a:p>
           <a:p>
@@ -5688,7 +5688,7 @@
                 </a:solidFill>
                 <a:latin typeface="Calibri"/>
               </a:rPr>
-              <a:t>A second run reports 0 changes and re-proves every invariant</a:t>
+              <a:t>Header re-read from the built binary; the ref audit still at its documented pre-existing baseline</a:t>
             </a:r>
           </a:p>
         </p:txBody>
@@ -5817,7 +5817,7 @@
                 </a:solidFill>
                 <a:latin typeface="Calibri"/>
               </a:rPr>
-              <a:t>All 30 Expert/Master confined to the five Ark/Undercity chests</a:t>
+              <a:t>All 30 Expert/Master confined to the five Ark/Undercity merchants; both generators idempotent</a:t>
             </a:r>
           </a:p>
         </p:txBody>
@@ -5988,7 +5988,7 @@
                 </a:solidFill>
                 <a:latin typeface="Calibri"/>
               </a:rPr>
-              <a:t>A clean build is not a working patch. At the vendor visit, confirm an Expert or Master tome AT Marius or an Undercity merchant — and its ABSENCE from Adreyo and the Wild Mages.</a:t>
+              <a:t>A clean build is not a working patch. At the vendor visit, confirm an Expert or Master tome AT Marius or an Undercity merchant — and its ABSENCE from Adreyo and the Shrouded Mages.</a:t>
             </a:r>
           </a:p>
         </p:txBody>
@@ -6040,7 +6040,7 @@
             <a:avLst/>
           </a:prstGeom>
           <a:solidFill>
-            <a:srgbClr val="A8332B"/>
+            <a:srgbClr val="B4862C"/>
           </a:solidFill>
           <a:ln>
             <a:noFill/>
@@ -6095,7 +6095,7 @@
                 </a:solidFill>
                 <a:latin typeface="Calibri"/>
               </a:rPr>
-              <a:t>Three chests collide with EGO</a:t>
+              <a:t>Hooks verified statically, not played</a:t>
             </a:r>
           </a:p>
           <a:p>
@@ -6117,7 +6117,7 @@
                 </a:solidFill>
                 <a:latin typeface="Calibri"/>
               </a:rPr>
-              <a:t>CCBlacksmithArkGuard, Sister Envy and Hehler ARE in EGO's 319 container overrides. The vendor-mapping doc claimed all ten were clear. We load after EGO and would revert it on those three.</a:t>
+              <a:t>They are wired into the chests and carry the right flags — UseAll, no ChanceNone, no Global — but nobody has yet watched one produce an item in game.</a:t>
             </a:r>
           </a:p>
         </p:txBody>
@@ -6169,7 +6169,7 @@
             <a:avLst/>
           </a:prstGeom>
           <a:solidFill>
-            <a:srgbClr val="A8332B"/>
+            <a:srgbClr val="2E6F4F"/>
           </a:solidFill>
           <a:ln>
             <a:noFill/>
@@ -6224,7 +6224,7 @@
                 </a:solidFill>
                 <a:latin typeface="Calibri"/>
               </a:rPr>
-              <a:t>Re-homing them is not easy</a:t>
+              <a:t>RESOLVED: the EGO collision</a:t>
             </a:r>
           </a:p>
           <a:p>
@@ -6246,7 +6246,7 @@
                 </a:solidFill>
                 <a:latin typeface="Calibri"/>
               </a:rPr>
-              <a:t>EGO owns Ark's commerce: of 55 capital merchant chests only 6 are clear, all 250–405 gold. Every Ark chest at 900+ is EGO's. Accept it, forward EGO's records, or ship a separate EGO patch.</a:t>
+              <a:t>Three chests — CCBlacksmithArkGuard, Sister Envy, Hehler — were in EGO's 319 container overrides. Moving to the hooks removed every chest override, so there is nothing left to conflict.</a:t>
             </a:r>
           </a:p>
         </p:txBody>
@@ -9646,7 +9646,7 @@
                 </a:solidFill>
                 <a:latin typeface="Calibri"/>
               </a:rPr>
-              <a:t>Ten Enderal merchant chests are overridden and the mod's own tome bundles appended as ordinary items. No scripting, no save-state, no leveled-list dice.</a:t>
+              <a:t>The tome bundles reach ten Enderal merchants — but through an empty leveled list SureAI already put inside each of their chests, never through the chest record itself. No scripting, no save-state, no leveled-list dice.</a:t>
             </a:r>
           </a:p>
         </p:txBody>
@@ -9806,7 +9806,7 @@
                 </a:solidFill>
                 <a:latin typeface="Calibri"/>
               </a:rPr>
-              <a:t>overridden verbatim from FS</a:t>
+              <a:t>WE NEVER TOUCH IT</a:t>
             </a:r>
           </a:p>
         </p:txBody>
@@ -9850,6 +9850,197 @@
         <p:spPr>
           <a:xfrm>
             <a:off x="3776472" y="2286000"/>
+            <a:ext cx="2240280" cy="1371600"/>
+          </a:xfrm>
+          <a:prstGeom prst="rect">
+            <a:avLst/>
+          </a:prstGeom>
+          <a:solidFill>
+            <a:srgbClr val="FFFFFF"/>
+          </a:solidFill>
+          <a:ln w="19050">
+            <a:solidFill>
+              <a:srgbClr val="A8332B"/>
+            </a:solidFill>
+          </a:ln>
+          <a:effectLst/>
+        </p:spPr>
+        <p:txBody>
+          <a:bodyPr rtlCol="0" anchor="ctr" wrap="square"/>
+          <a:lstStyle/>
+          <a:p>
+            <a:pPr algn="ctr"/>
+          </a:p>
+        </p:txBody>
+      </p:sp>
+      <p:sp>
+        <p:nvSpPr>
+          <p:cNvPr id="11" name="Rectangle 10"/>
+          <p:cNvSpPr/>
+          <p:nvPr/>
+        </p:nvSpPr>
+        <p:spPr>
+          <a:xfrm>
+            <a:off x="3776472" y="2286000"/>
+            <a:ext cx="2240280" cy="310896"/>
+          </a:xfrm>
+          <a:prstGeom prst="rect">
+            <a:avLst/>
+          </a:prstGeom>
+          <a:solidFill>
+            <a:srgbClr val="A8332B"/>
+          </a:solidFill>
+          <a:ln>
+            <a:noFill/>
+          </a:ln>
+          <a:effectLst/>
+        </p:spPr>
+        <p:txBody>
+          <a:bodyPr rtlCol="0" anchor="ctr" wrap="square" lIns="73152" rIns="73152"/>
+          <a:lstStyle/>
+          <a:p>
+            <a:pPr algn="ctr"/>
+            <a:r>
+              <a:rPr sz="1050" b="1">
+                <a:solidFill>
+                  <a:srgbClr val="FFFFFF"/>
+                </a:solidFill>
+                <a:latin typeface="Calibri"/>
+              </a:rPr>
+              <a:t>SUREAI'S HOOK</a:t>
+            </a:r>
+          </a:p>
+        </p:txBody>
+      </p:sp>
+      <p:sp>
+        <p:nvSpPr>
+          <p:cNvPr id="12" name="TextBox 11"/>
+          <p:cNvSpPr txBox="1"/>
+          <p:nvPr/>
+        </p:nvSpPr>
+        <p:spPr>
+          <a:xfrm>
+            <a:off x="3913632" y="2715768"/>
+            <a:ext cx="1965960" cy="457200"/>
+          </a:xfrm>
+          <a:prstGeom prst="rect">
+            <a:avLst/>
+          </a:prstGeom>
+          <a:noFill/>
+        </p:spPr>
+        <p:txBody>
+          <a:bodyPr wrap="square" anchor="t" lIns="0" rIns="0" tIns="0" bIns="0">
+            <a:spAutoFit/>
+          </a:bodyPr>
+          <a:lstStyle/>
+          <a:p>
+            <a:pPr algn="ctr">
+              <a:lnSpc>
+                <a:spcPct val="110000"/>
+              </a:lnSpc>
+              <a:spcBef>
+                <a:spcPts val="0"/>
+              </a:spcBef>
+              <a:spcAft>
+                <a:spcPts val="600"/>
+              </a:spcAft>
+            </a:pPr>
+            <a:r>
+              <a:rPr sz="1050" b="1">
+                <a:solidFill>
+                  <a:srgbClr val="1B1B24"/>
+                </a:solidFill>
+                <a:latin typeface="Consolas"/>
+              </a:rPr>
+              <a:t>BibliothekarMarius_
+CustomMerchandise</a:t>
+            </a:r>
+          </a:p>
+          <a:p>
+            <a:pPr algn="ctr">
+              <a:lnSpc>
+                <a:spcPct val="110000"/>
+              </a:lnSpc>
+              <a:spcBef>
+                <a:spcPts val="0"/>
+              </a:spcBef>
+              <a:spcAft>
+                <a:spcPts val="0"/>
+              </a:spcAft>
+            </a:pPr>
+            <a:r>
+              <a:rPr sz="1050" b="0">
+                <a:solidFill>
+                  <a:srgbClr val="5E5E70"/>
+                </a:solidFill>
+                <a:latin typeface="Calibri"/>
+              </a:rPr>
+              <a:t>empty LeveledItem · UseAll</a:t>
+            </a:r>
+          </a:p>
+          <a:p>
+            <a:pPr algn="ctr">
+              <a:lnSpc>
+                <a:spcPct val="110000"/>
+              </a:lnSpc>
+              <a:spcBef>
+                <a:spcPts val="0"/>
+              </a:spcBef>
+              <a:spcAft>
+                <a:spcPts val="0"/>
+              </a:spcAft>
+            </a:pPr>
+            <a:r>
+              <a:rPr sz="1050" b="0">
+                <a:solidFill>
+                  <a:srgbClr val="5E5E70"/>
+                </a:solidFill>
+                <a:latin typeface="Calibri"/>
+              </a:rPr>
+              <a:t>the ONE record we override</a:t>
+            </a:r>
+          </a:p>
+        </p:txBody>
+      </p:sp>
+      <p:sp>
+        <p:nvSpPr>
+          <p:cNvPr id="13" name="Right Arrow 12"/>
+          <p:cNvSpPr/>
+          <p:nvPr/>
+        </p:nvSpPr>
+        <p:spPr>
+          <a:xfrm>
+            <a:off x="6089904" y="2871216"/>
+            <a:ext cx="493776" cy="201168"/>
+          </a:xfrm>
+          <a:prstGeom prst="rightArrow">
+            <a:avLst/>
+          </a:prstGeom>
+          <a:solidFill>
+            <a:srgbClr val="C2C2CC"/>
+          </a:solidFill>
+          <a:ln>
+            <a:noFill/>
+          </a:ln>
+          <a:effectLst/>
+        </p:spPr>
+        <p:txBody>
+          <a:bodyPr rtlCol="0" anchor="ctr" wrap="square"/>
+          <a:lstStyle/>
+          <a:p>
+            <a:pPr algn="ctr"/>
+          </a:p>
+        </p:txBody>
+      </p:sp>
+      <p:sp>
+        <p:nvSpPr>
+          <p:cNvPr id="14" name="Rectangle 13"/>
+          <p:cNvSpPr/>
+          <p:nvPr/>
+        </p:nvSpPr>
+        <p:spPr>
+          <a:xfrm>
+            <a:off x="6656832" y="2286000"/>
             <a:ext cx="2240280" cy="1371600"/>
           </a:xfrm>
           <a:prstGeom prst="rect">
@@ -9875,13 +10066,13 @@
       </p:sp>
       <p:sp>
         <p:nvSpPr>
-          <p:cNvPr id="11" name="Rectangle 10"/>
+          <p:cNvPr id="15" name="Rectangle 14"/>
           <p:cNvSpPr/>
           <p:nvPr/>
         </p:nvSpPr>
         <p:spPr>
           <a:xfrm>
-            <a:off x="3776472" y="2286000"/>
+            <a:off x="6656832" y="2286000"/>
             <a:ext cx="2240280" cy="310896"/>
           </a:xfrm>
           <a:prstGeom prst="rect">
@@ -9907,20 +10098,20 @@
                 </a:solidFill>
                 <a:latin typeface="Calibri"/>
               </a:rPr>
-              <a:t>PARENT BUNDLE</a:t>
-            </a:r>
-          </a:p>
-        </p:txBody>
-      </p:sp>
-      <p:sp>
-        <p:nvSpPr>
-          <p:cNvPr id="12" name="TextBox 11"/>
+              <a:t>OUR BUNDLES</a:t>
+            </a:r>
+          </a:p>
+        </p:txBody>
+      </p:sp>
+      <p:sp>
+        <p:nvSpPr>
+          <p:cNvPr id="16" name="TextBox 15"/>
           <p:cNvSpPr txBox="1"/>
           <p:nvPr/>
         </p:nvSpPr>
         <p:spPr>
           <a:xfrm>
-            <a:off x="3913632" y="2715768"/>
+            <a:off x="6793992" y="2715768"/>
             <a:ext cx="1965960" cy="457200"/>
           </a:xfrm>
           <a:prstGeom prst="rect">
@@ -9997,198 +10188,7 @@
                 </a:solidFill>
                 <a:latin typeface="Calibri"/>
               </a:rPr>
-              <a:t>5 entries, one per tier</a:t>
-            </a:r>
-          </a:p>
-        </p:txBody>
-      </p:sp>
-      <p:sp>
-        <p:nvSpPr>
-          <p:cNvPr id="13" name="Right Arrow 12"/>
-          <p:cNvSpPr/>
-          <p:nvPr/>
-        </p:nvSpPr>
-        <p:spPr>
-          <a:xfrm>
-            <a:off x="6089904" y="2871216"/>
-            <a:ext cx="493776" cy="201168"/>
-          </a:xfrm>
-          <a:prstGeom prst="rightArrow">
-            <a:avLst/>
-          </a:prstGeom>
-          <a:solidFill>
-            <a:srgbClr val="C2C2CC"/>
-          </a:solidFill>
-          <a:ln>
-            <a:noFill/>
-          </a:ln>
-          <a:effectLst/>
-        </p:spPr>
-        <p:txBody>
-          <a:bodyPr rtlCol="0" anchor="ctr" wrap="square"/>
-          <a:lstStyle/>
-          <a:p>
-            <a:pPr algn="ctr"/>
-          </a:p>
-        </p:txBody>
-      </p:sp>
-      <p:sp>
-        <p:nvSpPr>
-          <p:cNvPr id="14" name="Rectangle 13"/>
-          <p:cNvSpPr/>
-          <p:nvPr/>
-        </p:nvSpPr>
-        <p:spPr>
-          <a:xfrm>
-            <a:off x="6656832" y="2286000"/>
-            <a:ext cx="2240280" cy="1371600"/>
-          </a:xfrm>
-          <a:prstGeom prst="rect">
-            <a:avLst/>
-          </a:prstGeom>
-          <a:solidFill>
-            <a:srgbClr val="FFFFFF"/>
-          </a:solidFill>
-          <a:ln w="19050">
-            <a:solidFill>
-              <a:srgbClr val="B4862C"/>
-            </a:solidFill>
-          </a:ln>
-          <a:effectLst/>
-        </p:spPr>
-        <p:txBody>
-          <a:bodyPr rtlCol="0" anchor="ctr" wrap="square"/>
-          <a:lstStyle/>
-          <a:p>
-            <a:pPr algn="ctr"/>
-          </a:p>
-        </p:txBody>
-      </p:sp>
-      <p:sp>
-        <p:nvSpPr>
-          <p:cNvPr id="15" name="Rectangle 14"/>
-          <p:cNvSpPr/>
-          <p:nvPr/>
-        </p:nvSpPr>
-        <p:spPr>
-          <a:xfrm>
-            <a:off x="6656832" y="2286000"/>
-            <a:ext cx="2240280" cy="310896"/>
-          </a:xfrm>
-          <a:prstGeom prst="rect">
-            <a:avLst/>
-          </a:prstGeom>
-          <a:solidFill>
-            <a:srgbClr val="B4862C"/>
-          </a:solidFill>
-          <a:ln>
-            <a:noFill/>
-          </a:ln>
-          <a:effectLst/>
-        </p:spPr>
-        <p:txBody>
-          <a:bodyPr rtlCol="0" anchor="ctr" wrap="square" lIns="73152" rIns="73152"/>
-          <a:lstStyle/>
-          <a:p>
-            <a:pPr algn="ctr"/>
-            <a:r>
-              <a:rPr sz="1050" b="1">
-                <a:solidFill>
-                  <a:srgbClr val="FFFFFF"/>
-                </a:solidFill>
-                <a:latin typeface="Calibri"/>
-              </a:rPr>
-              <a:t>TIER BUNDLE</a:t>
-            </a:r>
-          </a:p>
-        </p:txBody>
-      </p:sp>
-      <p:sp>
-        <p:nvSpPr>
-          <p:cNvPr id="16" name="TextBox 15"/>
-          <p:cNvSpPr txBox="1"/>
-          <p:nvPr/>
-        </p:nvSpPr>
-        <p:spPr>
-          <a:xfrm>
-            <a:off x="6793992" y="2715768"/>
-            <a:ext cx="1965960" cy="457200"/>
-          </a:xfrm>
-          <a:prstGeom prst="rect">
-            <a:avLst/>
-          </a:prstGeom>
-          <a:noFill/>
-        </p:spPr>
-        <p:txBody>
-          <a:bodyPr wrap="square" anchor="t" lIns="0" rIns="0" tIns="0" bIns="0">
-            <a:spAutoFit/>
-          </a:bodyPr>
-          <a:lstStyle/>
-          <a:p>
-            <a:pPr algn="ctr">
-              <a:lnSpc>
-                <a:spcPct val="110000"/>
-              </a:lnSpc>
-              <a:spcBef>
-                <a:spcPts val="0"/>
-              </a:spcBef>
-              <a:spcAft>
-                <a:spcPts val="600"/>
-              </a:spcAft>
-            </a:pPr>
-            <a:r>
-              <a:rPr sz="1050" b="1">
-                <a:solidFill>
-                  <a:srgbClr val="1B1B24"/>
-                </a:solidFill>
-                <a:latin typeface="Consolas"/>
-              </a:rPr>
-              <a:t>TVR_Tomes_Litem_
-Cleric_050_Restoration</a:t>
-            </a:r>
-          </a:p>
-          <a:p>
-            <a:pPr algn="ctr">
-              <a:lnSpc>
-                <a:spcPct val="110000"/>
-              </a:lnSpc>
-              <a:spcBef>
-                <a:spcPts val="0"/>
-              </a:spcBef>
-              <a:spcAft>
-                <a:spcPts val="0"/>
-              </a:spcAft>
-            </a:pPr>
-            <a:r>
-              <a:rPr sz="1050" b="0">
-                <a:solidFill>
-                  <a:srgbClr val="5E5E70"/>
-                </a:solidFill>
-                <a:latin typeface="Calibri"/>
-              </a:rPr>
-              <a:t>LeveledItem · UseAll</a:t>
-            </a:r>
-          </a:p>
-          <a:p>
-            <a:pPr algn="ctr">
-              <a:lnSpc>
-                <a:spcPct val="110000"/>
-              </a:lnSpc>
-              <a:spcBef>
-                <a:spcPts val="0"/>
-              </a:spcBef>
-              <a:spcAft>
-                <a:spcPts val="0"/>
-              </a:spcAft>
-            </a:pPr>
-            <a:r>
-              <a:rPr sz="1050" b="0">
-                <a:solidFill>
-                  <a:srgbClr val="5E5E70"/>
-                </a:solidFill>
-                <a:latin typeface="Calibri"/>
-              </a:rPr>
-              <a:t>1 entry</a:t>
+              <a:t>→ tier bundle → tome</a:t>
             </a:r>
           </a:p>
         </p:txBody>
@@ -10420,7 +10420,7 @@
                 </a:solidFill>
                 <a:latin typeface="Calibri"/>
               </a:rPr>
-              <a:t>1 chest entry</a:t>
+              <a:t>already contains it</a:t>
             </a:r>
           </a:p>
         </p:txBody>
@@ -10462,7 +10462,7 @@
                 </a:solidFill>
                 <a:latin typeface="Calibri"/>
               </a:rPr>
-              <a:t>× 5 tiers</a:t>
+              <a:t>1 entry per school</a:t>
             </a:r>
           </a:p>
         </p:txBody>
@@ -10504,7 +10504,7 @@
                 </a:solidFill>
                 <a:latin typeface="Calibri"/>
               </a:rPr>
-              <a:t>× 1 tome</a:t>
+              <a:t>× 5 tiers</a:t>
             </a:r>
           </a:p>
         </p:txBody>
@@ -10543,7 +10543,7 @@
                 </a:solidFill>
                 <a:latin typeface="Calibri"/>
               </a:rPr>
-              <a:t>Why UseAll is the whole trick</a:t>
+              <a:t>Why the hook, and why UseAll</a:t>
             </a:r>
           </a:p>
           <a:p>
@@ -10565,7 +10565,7 @@
                 </a:solidFill>
                 <a:latin typeface="Calibri"/>
               </a:rPr>
-              <a:t>An ordinary leveled list picks ONE entry per draw — that is what made Apocalypse's 160 tomes statistically invisible behind a single injected slot. A UseAll list yields EVERY entry instead. So one item entry in one chest deterministically stocks that archetype's entire 15-tome line, on every restock, forever.</a:t>
+              <a:t>Enderal ships 67 empty LeveledItems named &lt;Merchant&gt;_CustomMerchandise — one per merchant, each already sitting in that merchant's chest. They are an extension point SureAI built and never filled, so writing there instead of into the chest means we override no container at all. And every link in the chain is UseAll, which yields EVERY entry rather than one per draw — so a single hook entry deterministically stocks a whole 15-tome line, forever.</a:t>
             </a:r>
           </a:p>
         </p:txBody>
@@ -10607,7 +10607,7 @@
                 </a:solidFill>
                 <a:latin typeface="Calibri"/>
               </a:rPr>
-              <a:t>Three schools per archetype = three chest entries = the full 15</a:t>
+              <a:t>Three schools per archetype = three hook entries = the full 15</a:t>
             </a:r>
           </a:p>
         </p:txBody>
@@ -11307,7 +11307,7 @@
                 </a:solidFill>
                 <a:latin typeface="Calibri"/>
               </a:rPr>
-              <a:t>Wild Mage</a:t>
+              <a:t>Shrouded Mage</a:t>
             </a:r>
           </a:p>
         </p:txBody>
@@ -11582,7 +11582,7 @@
                 </a:solidFill>
                 <a:latin typeface="Calibri"/>
               </a:rPr>
-              <a:t>Wild Mage</a:t>
+              <a:t>Shrouded Mage</a:t>
             </a:r>
           </a:p>
         </p:txBody>
@@ -12052,7 +12052,7 @@
                 </a:solidFill>
                 <a:latin typeface="Calibri"/>
               </a:rPr>
-              <a:t>Wild Mage</a:t>
+              <a:t>Shrouded Mage</a:t>
             </a:r>
           </a:p>
         </p:txBody>
@@ -12756,7 +12756,7 @@
                 </a:solidFill>
                 <a:latin typeface="Calibri"/>
               </a:rPr>
-              <a:t>Hehler</a:t>
+              <a:t>The Fence</a:t>
             </a:r>
           </a:p>
         </p:txBody>
@@ -12798,7 +12798,7 @@
                 </a:solidFill>
                 <a:latin typeface="Calibri"/>
               </a:rPr>
-              <a:t>Undercity fence</a:t>
+              <a:t>Undercity (Hehler)</a:t>
             </a:r>
           </a:p>
         </p:txBody>
@@ -13432,7 +13432,7 @@
                 </a:solidFill>
                 <a:latin typeface="Calibri"/>
               </a:rPr>
-              <a:t>The Sells column is the Novice–Adept line. Expert and Master are sold only in Ark and the Undercity — see slide 10.</a:t>
+              <a:t>The Sells column is the Novice–Adept line; Expert and Master are Ark/Undercity only (slide 10). We override none of these chests — stock goes into each merchant's CustomMerchandise hook.</a:t>
             </a:r>
           </a:p>
         </p:txBody>
@@ -13474,7 +13474,7 @@
                 </a:solidFill>
                 <a:latin typeface="Calibri"/>
               </a:rPr>
-              <a:t>Each chest copied verbatim from the winning Forgotten Stories version before our entries are appended</a:t>
+              <a:t>Chosen for flavour fit and merchant wealth — no longer constrained by who else overrides the chest</a:t>
             </a:r>
           </a:p>
         </p:txBody>
@@ -14133,7 +14133,7 @@
                 </a:solidFill>
                 <a:latin typeface="Calibri"/>
               </a:rPr>
-              <a:t>Hehler</a:t>
+              <a:t>The Fence</a:t>
             </a:r>
           </a:p>
           <a:p>
